--- a/assets/pptx/catalog-197.pptx
+++ b/assets/pptx/catalog-197.pptx
@@ -3563,7 +3563,7 @@
                 <a:ea typeface="Ebrima"/>
                 <a:cs typeface="Ebrima"/>
               </a:rPr>
-              <a:t>1) ገበናን ሰው መግለጽ ይወዳል</a:t>
+              <a:t>1 ገበናን ሰው መግለጽ ይወዳል</a:t>
             </a:r>
           </a:p>
           <a:p>
@@ -3841,7 +3841,7 @@
                 <a:ea typeface="Ebrima"/>
                 <a:cs typeface="Ebrima"/>
               </a:rPr>
-              <a:t>2) ስንቆም ሞገስ የሚያላብሰን</a:t>
+              <a:t>2 ስንቆም ሞገስ የሚያላብሰን</a:t>
             </a:r>
           </a:p>
           <a:p>
@@ -4119,7 +4119,7 @@
                 <a:ea typeface="Ebrima"/>
                 <a:cs typeface="Ebrima"/>
               </a:rPr>
-              <a:t>3) ለመውገር ሁሉ ይቸኩላል</a:t>
+              <a:t>3 ለመውገር ሁሉ ይቸኩላል</a:t>
             </a:r>
           </a:p>
           <a:p>
@@ -4397,7 +4397,7 @@
                 <a:ea typeface="Ebrima"/>
                 <a:cs typeface="Ebrima"/>
               </a:rPr>
-              <a:t>4) ውለታው ለእኔ በዝቶብኛል</a:t>
+              <a:t>4 ውለታው ለእኔ በዝቶብኛል</a:t>
             </a:r>
           </a:p>
           <a:p>
